--- a/Editable-Portfolio-Showcase.pptx
+++ b/Editable-Portfolio-Showcase.pptx
@@ -5,9 +5,9 @@
     <p:sldMasterId id="2147483648" r:id="rId1"/>
   </p:sldMasterIdLst>
   <p:sldIdLst>
-    <p:sldId id="256" r:id="rId7"/>
+    <p:sldId id="256" r:id="rId2"/>
   </p:sldIdLst>
-  <p:sldSz cx="14630400" cy="8229600" type="screen4x3"/>
+  <p:sldSz cx="14630400" cy="8229600"/>
   <p:notesSz cx="6858000" cy="9144000"/>
   <p:defaultTextStyle>
     <a:defPPr>
@@ -104,6 +104,22 @@
       </a:defRPr>
     </a:lvl9pPr>
   </p:defaultTextStyle>
+  <p:extLst>
+    <p:ext uri="{EFAFB233-063F-42B5-8137-9DF3F51BA10A}">
+      <p15:sldGuideLst xmlns:p15="http://schemas.microsoft.com/office/powerpoint/2012/main">
+        <p15:guide id="1" orient="horz" pos="2160">
+          <p15:clr>
+            <a:srgbClr val="A4A3A4"/>
+          </p15:clr>
+        </p15:guide>
+        <p15:guide id="2" pos="2880">
+          <p15:clr>
+            <a:srgbClr val="A4A3A4"/>
+          </p15:clr>
+        </p15:guide>
+      </p15:sldGuideLst>
+    </p:ext>
+  </p:extLst>
 </p:presentation>
 </file>
 
@@ -145,10 +161,9 @@
           <a:lstStyle/>
           <a:p>
             <a:r>
-              <a:rPr lang="en-US" smtClean="0"/>
+              <a:rPr lang="en-US"/>
               <a:t>Click to edit Master title style</a:t>
             </a:r>
-            <a:endParaRPr lang="en-US"/>
           </a:p>
         </p:txBody>
       </p:sp>
@@ -264,10 +279,9 @@
           </a:lstStyle>
           <a:p>
             <a:r>
-              <a:rPr lang="en-US" smtClean="0"/>
+              <a:rPr lang="en-US"/>
               <a:t>Click to edit Master subtitle style</a:t>
             </a:r>
-            <a:endParaRPr lang="en-US"/>
           </a:p>
         </p:txBody>
       </p:sp>
@@ -288,7 +302,7 @@
           <a:p>
             <a:fld id="{5BCAD085-E8A6-8845-BD4E-CB4CCA059FC4}" type="datetimeFigureOut">
               <a:rPr lang="en-US" smtClean="0"/>
-              <a:t>1/27/13</a:t>
+              <a:t>10/19/2026</a:t>
             </a:fld>
             <a:endParaRPr lang="en-US"/>
           </a:p>
@@ -382,10 +396,9 @@
           <a:lstStyle/>
           <a:p>
             <a:r>
-              <a:rPr lang="en-US" smtClean="0"/>
+              <a:rPr lang="en-US"/>
               <a:t>Click to edit Master title style</a:t>
             </a:r>
-            <a:endParaRPr lang="en-US"/>
           </a:p>
         </p:txBody>
       </p:sp>
@@ -406,38 +419,37 @@
           <a:p>
             <a:pPr lvl="0"/>
             <a:r>
-              <a:rPr lang="en-US" smtClean="0"/>
+              <a:rPr lang="en-US"/>
               <a:t>Click to edit Master text styles</a:t>
             </a:r>
           </a:p>
           <a:p>
             <a:pPr lvl="1"/>
             <a:r>
-              <a:rPr lang="en-US" smtClean="0"/>
+              <a:rPr lang="en-US"/>
               <a:t>Second level</a:t>
             </a:r>
           </a:p>
           <a:p>
             <a:pPr lvl="2"/>
             <a:r>
-              <a:rPr lang="en-US" smtClean="0"/>
+              <a:rPr lang="en-US"/>
               <a:t>Third level</a:t>
             </a:r>
           </a:p>
           <a:p>
             <a:pPr lvl="3"/>
             <a:r>
-              <a:rPr lang="en-US" smtClean="0"/>
+              <a:rPr lang="en-US"/>
               <a:t>Fourth level</a:t>
             </a:r>
           </a:p>
           <a:p>
             <a:pPr lvl="4"/>
             <a:r>
-              <a:rPr lang="en-US" smtClean="0"/>
+              <a:rPr lang="en-US"/>
               <a:t>Fifth level</a:t>
             </a:r>
-            <a:endParaRPr lang="en-US"/>
           </a:p>
         </p:txBody>
       </p:sp>
@@ -458,7 +470,7 @@
           <a:p>
             <a:fld id="{5BCAD085-E8A6-8845-BD4E-CB4CCA059FC4}" type="datetimeFigureOut">
               <a:rPr lang="en-US" smtClean="0"/>
-              <a:t>1/27/13</a:t>
+              <a:t>10/19/2026</a:t>
             </a:fld>
             <a:endParaRPr lang="en-US"/>
           </a:p>
@@ -557,10 +569,9 @@
           <a:lstStyle/>
           <a:p>
             <a:r>
-              <a:rPr lang="en-US" smtClean="0"/>
+              <a:rPr lang="en-US"/>
               <a:t>Click to edit Master title style</a:t>
             </a:r>
-            <a:endParaRPr lang="en-US"/>
           </a:p>
         </p:txBody>
       </p:sp>
@@ -586,38 +597,37 @@
           <a:p>
             <a:pPr lvl="0"/>
             <a:r>
-              <a:rPr lang="en-US" smtClean="0"/>
+              <a:rPr lang="en-US"/>
               <a:t>Click to edit Master text styles</a:t>
             </a:r>
           </a:p>
           <a:p>
             <a:pPr lvl="1"/>
             <a:r>
-              <a:rPr lang="en-US" smtClean="0"/>
+              <a:rPr lang="en-US"/>
               <a:t>Second level</a:t>
             </a:r>
           </a:p>
           <a:p>
             <a:pPr lvl="2"/>
             <a:r>
-              <a:rPr lang="en-US" smtClean="0"/>
+              <a:rPr lang="en-US"/>
               <a:t>Third level</a:t>
             </a:r>
           </a:p>
           <a:p>
             <a:pPr lvl="3"/>
             <a:r>
-              <a:rPr lang="en-US" smtClean="0"/>
+              <a:rPr lang="en-US"/>
               <a:t>Fourth level</a:t>
             </a:r>
           </a:p>
           <a:p>
             <a:pPr lvl="4"/>
             <a:r>
-              <a:rPr lang="en-US" smtClean="0"/>
+              <a:rPr lang="en-US"/>
               <a:t>Fifth level</a:t>
             </a:r>
-            <a:endParaRPr lang="en-US"/>
           </a:p>
         </p:txBody>
       </p:sp>
@@ -638,7 +648,7 @@
           <a:p>
             <a:fld id="{5BCAD085-E8A6-8845-BD4E-CB4CCA059FC4}" type="datetimeFigureOut">
               <a:rPr lang="en-US" smtClean="0"/>
-              <a:t>1/27/13</a:t>
+              <a:t>10/19/2026</a:t>
             </a:fld>
             <a:endParaRPr lang="en-US"/>
           </a:p>
@@ -732,10 +742,9 @@
           <a:lstStyle/>
           <a:p>
             <a:r>
-              <a:rPr lang="en-US" smtClean="0"/>
+              <a:rPr lang="en-US"/>
               <a:t>Click to edit Master title style</a:t>
             </a:r>
-            <a:endParaRPr lang="en-US"/>
           </a:p>
         </p:txBody>
       </p:sp>
@@ -756,38 +765,37 @@
           <a:p>
             <a:pPr lvl="0"/>
             <a:r>
-              <a:rPr lang="en-US" smtClean="0"/>
+              <a:rPr lang="en-US"/>
               <a:t>Click to edit Master text styles</a:t>
             </a:r>
           </a:p>
           <a:p>
             <a:pPr lvl="1"/>
             <a:r>
-              <a:rPr lang="en-US" smtClean="0"/>
+              <a:rPr lang="en-US"/>
               <a:t>Second level</a:t>
             </a:r>
           </a:p>
           <a:p>
             <a:pPr lvl="2"/>
             <a:r>
-              <a:rPr lang="en-US" smtClean="0"/>
+              <a:rPr lang="en-US"/>
               <a:t>Third level</a:t>
             </a:r>
           </a:p>
           <a:p>
             <a:pPr lvl="3"/>
             <a:r>
-              <a:rPr lang="en-US" smtClean="0"/>
+              <a:rPr lang="en-US"/>
               <a:t>Fourth level</a:t>
             </a:r>
           </a:p>
           <a:p>
             <a:pPr lvl="4"/>
             <a:r>
-              <a:rPr lang="en-US" smtClean="0"/>
+              <a:rPr lang="en-US"/>
               <a:t>Fifth level</a:t>
             </a:r>
-            <a:endParaRPr lang="en-US"/>
           </a:p>
         </p:txBody>
       </p:sp>
@@ -808,7 +816,7 @@
           <a:p>
             <a:fld id="{5BCAD085-E8A6-8845-BD4E-CB4CCA059FC4}" type="datetimeFigureOut">
               <a:rPr lang="en-US" smtClean="0"/>
-              <a:t>1/27/13</a:t>
+              <a:t>10/19/2026</a:t>
             </a:fld>
             <a:endParaRPr lang="en-US"/>
           </a:p>
@@ -911,10 +919,9 @@
           </a:lstStyle>
           <a:p>
             <a:r>
-              <a:rPr lang="en-US" smtClean="0"/>
+              <a:rPr lang="en-US"/>
               <a:t>Click to edit Master title style</a:t>
             </a:r>
-            <a:endParaRPr lang="en-US"/>
           </a:p>
         </p:txBody>
       </p:sp>
@@ -1031,7 +1038,7 @@
           <a:p>
             <a:pPr lvl="0"/>
             <a:r>
-              <a:rPr lang="en-US" smtClean="0"/>
+              <a:rPr lang="en-US"/>
               <a:t>Click to edit Master text styles</a:t>
             </a:r>
           </a:p>
@@ -1054,7 +1061,7 @@
           <a:p>
             <a:fld id="{5BCAD085-E8A6-8845-BD4E-CB4CCA059FC4}" type="datetimeFigureOut">
               <a:rPr lang="en-US" smtClean="0"/>
-              <a:t>1/27/13</a:t>
+              <a:t>10/19/2026</a:t>
             </a:fld>
             <a:endParaRPr lang="en-US"/>
           </a:p>
@@ -1148,10 +1155,9 @@
           <a:lstStyle/>
           <a:p>
             <a:r>
-              <a:rPr lang="en-US" smtClean="0"/>
+              <a:rPr lang="en-US"/>
               <a:t>Click to edit Master title style</a:t>
             </a:r>
-            <a:endParaRPr lang="en-US"/>
           </a:p>
         </p:txBody>
       </p:sp>
@@ -1205,38 +1211,37 @@
           <a:p>
             <a:pPr lvl="0"/>
             <a:r>
-              <a:rPr lang="en-US" smtClean="0"/>
+              <a:rPr lang="en-US"/>
               <a:t>Click to edit Master text styles</a:t>
             </a:r>
           </a:p>
           <a:p>
             <a:pPr lvl="1"/>
             <a:r>
-              <a:rPr lang="en-US" smtClean="0"/>
+              <a:rPr lang="en-US"/>
               <a:t>Second level</a:t>
             </a:r>
           </a:p>
           <a:p>
             <a:pPr lvl="2"/>
             <a:r>
-              <a:rPr lang="en-US" smtClean="0"/>
+              <a:rPr lang="en-US"/>
               <a:t>Third level</a:t>
             </a:r>
           </a:p>
           <a:p>
             <a:pPr lvl="3"/>
             <a:r>
-              <a:rPr lang="en-US" smtClean="0"/>
+              <a:rPr lang="en-US"/>
               <a:t>Fourth level</a:t>
             </a:r>
           </a:p>
           <a:p>
             <a:pPr lvl="4"/>
             <a:r>
-              <a:rPr lang="en-US" smtClean="0"/>
+              <a:rPr lang="en-US"/>
               <a:t>Fifth level</a:t>
             </a:r>
-            <a:endParaRPr lang="en-US"/>
           </a:p>
         </p:txBody>
       </p:sp>
@@ -1290,38 +1295,37 @@
           <a:p>
             <a:pPr lvl="0"/>
             <a:r>
-              <a:rPr lang="en-US" smtClean="0"/>
+              <a:rPr lang="en-US"/>
               <a:t>Click to edit Master text styles</a:t>
             </a:r>
           </a:p>
           <a:p>
             <a:pPr lvl="1"/>
             <a:r>
-              <a:rPr lang="en-US" smtClean="0"/>
+              <a:rPr lang="en-US"/>
               <a:t>Second level</a:t>
             </a:r>
           </a:p>
           <a:p>
             <a:pPr lvl="2"/>
             <a:r>
-              <a:rPr lang="en-US" smtClean="0"/>
+              <a:rPr lang="en-US"/>
               <a:t>Third level</a:t>
             </a:r>
           </a:p>
           <a:p>
             <a:pPr lvl="3"/>
             <a:r>
-              <a:rPr lang="en-US" smtClean="0"/>
+              <a:rPr lang="en-US"/>
               <a:t>Fourth level</a:t>
             </a:r>
           </a:p>
           <a:p>
             <a:pPr lvl="4"/>
             <a:r>
-              <a:rPr lang="en-US" smtClean="0"/>
+              <a:rPr lang="en-US"/>
               <a:t>Fifth level</a:t>
             </a:r>
-            <a:endParaRPr lang="en-US"/>
           </a:p>
         </p:txBody>
       </p:sp>
@@ -1342,7 +1346,7 @@
           <a:p>
             <a:fld id="{5BCAD085-E8A6-8845-BD4E-CB4CCA059FC4}" type="datetimeFigureOut">
               <a:rPr lang="en-US" smtClean="0"/>
-              <a:t>1/27/13</a:t>
+              <a:t>10/19/2026</a:t>
             </a:fld>
             <a:endParaRPr lang="en-US"/>
           </a:p>
@@ -1440,10 +1444,9 @@
           </a:lstStyle>
           <a:p>
             <a:r>
-              <a:rPr lang="en-US" smtClean="0"/>
+              <a:rPr lang="en-US"/>
               <a:t>Click to edit Master title style</a:t>
             </a:r>
-            <a:endParaRPr lang="en-US"/>
           </a:p>
         </p:txBody>
       </p:sp>
@@ -1506,7 +1509,7 @@
           <a:p>
             <a:pPr lvl="0"/>
             <a:r>
-              <a:rPr lang="en-US" smtClean="0"/>
+              <a:rPr lang="en-US"/>
               <a:t>Click to edit Master text styles</a:t>
             </a:r>
           </a:p>
@@ -1562,38 +1565,37 @@
           <a:p>
             <a:pPr lvl="0"/>
             <a:r>
-              <a:rPr lang="en-US" smtClean="0"/>
+              <a:rPr lang="en-US"/>
               <a:t>Click to edit Master text styles</a:t>
             </a:r>
           </a:p>
           <a:p>
             <a:pPr lvl="1"/>
             <a:r>
-              <a:rPr lang="en-US" smtClean="0"/>
+              <a:rPr lang="en-US"/>
               <a:t>Second level</a:t>
             </a:r>
           </a:p>
           <a:p>
             <a:pPr lvl="2"/>
             <a:r>
-              <a:rPr lang="en-US" smtClean="0"/>
+              <a:rPr lang="en-US"/>
               <a:t>Third level</a:t>
             </a:r>
           </a:p>
           <a:p>
             <a:pPr lvl="3"/>
             <a:r>
-              <a:rPr lang="en-US" smtClean="0"/>
+              <a:rPr lang="en-US"/>
               <a:t>Fourth level</a:t>
             </a:r>
           </a:p>
           <a:p>
             <a:pPr lvl="4"/>
             <a:r>
-              <a:rPr lang="en-US" smtClean="0"/>
+              <a:rPr lang="en-US"/>
               <a:t>Fifth level</a:t>
             </a:r>
-            <a:endParaRPr lang="en-US"/>
           </a:p>
         </p:txBody>
       </p:sp>
@@ -1656,7 +1658,7 @@
           <a:p>
             <a:pPr lvl="0"/>
             <a:r>
-              <a:rPr lang="en-US" smtClean="0"/>
+              <a:rPr lang="en-US"/>
               <a:t>Click to edit Master text styles</a:t>
             </a:r>
           </a:p>
@@ -1712,38 +1714,37 @@
           <a:p>
             <a:pPr lvl="0"/>
             <a:r>
-              <a:rPr lang="en-US" smtClean="0"/>
+              <a:rPr lang="en-US"/>
               <a:t>Click to edit Master text styles</a:t>
             </a:r>
           </a:p>
           <a:p>
             <a:pPr lvl="1"/>
             <a:r>
-              <a:rPr lang="en-US" smtClean="0"/>
+              <a:rPr lang="en-US"/>
               <a:t>Second level</a:t>
             </a:r>
           </a:p>
           <a:p>
             <a:pPr lvl="2"/>
             <a:r>
-              <a:rPr lang="en-US" smtClean="0"/>
+              <a:rPr lang="en-US"/>
               <a:t>Third level</a:t>
             </a:r>
           </a:p>
           <a:p>
             <a:pPr lvl="3"/>
             <a:r>
-              <a:rPr lang="en-US" smtClean="0"/>
+              <a:rPr lang="en-US"/>
               <a:t>Fourth level</a:t>
             </a:r>
           </a:p>
           <a:p>
             <a:pPr lvl="4"/>
             <a:r>
-              <a:rPr lang="en-US" smtClean="0"/>
+              <a:rPr lang="en-US"/>
               <a:t>Fifth level</a:t>
             </a:r>
-            <a:endParaRPr lang="en-US"/>
           </a:p>
         </p:txBody>
       </p:sp>
@@ -1764,7 +1765,7 @@
           <a:p>
             <a:fld id="{5BCAD085-E8A6-8845-BD4E-CB4CCA059FC4}" type="datetimeFigureOut">
               <a:rPr lang="en-US" smtClean="0"/>
-              <a:t>1/27/13</a:t>
+              <a:t>10/19/2026</a:t>
             </a:fld>
             <a:endParaRPr lang="en-US"/>
           </a:p>
@@ -1858,10 +1859,9 @@
           <a:lstStyle/>
           <a:p>
             <a:r>
-              <a:rPr lang="en-US" smtClean="0"/>
+              <a:rPr lang="en-US"/>
               <a:t>Click to edit Master title style</a:t>
             </a:r>
-            <a:endParaRPr lang="en-US"/>
           </a:p>
         </p:txBody>
       </p:sp>
@@ -1882,7 +1882,7 @@
           <a:p>
             <a:fld id="{5BCAD085-E8A6-8845-BD4E-CB4CCA059FC4}" type="datetimeFigureOut">
               <a:rPr lang="en-US" smtClean="0"/>
-              <a:t>1/27/13</a:t>
+              <a:t>10/19/2026</a:t>
             </a:fld>
             <a:endParaRPr lang="en-US"/>
           </a:p>
@@ -1977,7 +1977,7 @@
           <a:p>
             <a:fld id="{5BCAD085-E8A6-8845-BD4E-CB4CCA059FC4}" type="datetimeFigureOut">
               <a:rPr lang="en-US" smtClean="0"/>
-              <a:t>1/27/13</a:t>
+              <a:t>10/19/2026</a:t>
             </a:fld>
             <a:endParaRPr lang="en-US"/>
           </a:p>
@@ -2080,10 +2080,9 @@
           </a:lstStyle>
           <a:p>
             <a:r>
-              <a:rPr lang="en-US" smtClean="0"/>
+              <a:rPr lang="en-US"/>
               <a:t>Click to edit Master title style</a:t>
             </a:r>
-            <a:endParaRPr lang="en-US"/>
           </a:p>
         </p:txBody>
       </p:sp>
@@ -2137,38 +2136,37 @@
           <a:p>
             <a:pPr lvl="0"/>
             <a:r>
-              <a:rPr lang="en-US" smtClean="0"/>
+              <a:rPr lang="en-US"/>
               <a:t>Click to edit Master text styles</a:t>
             </a:r>
           </a:p>
           <a:p>
             <a:pPr lvl="1"/>
             <a:r>
-              <a:rPr lang="en-US" smtClean="0"/>
+              <a:rPr lang="en-US"/>
               <a:t>Second level</a:t>
             </a:r>
           </a:p>
           <a:p>
             <a:pPr lvl="2"/>
             <a:r>
-              <a:rPr lang="en-US" smtClean="0"/>
+              <a:rPr lang="en-US"/>
               <a:t>Third level</a:t>
             </a:r>
           </a:p>
           <a:p>
             <a:pPr lvl="3"/>
             <a:r>
-              <a:rPr lang="en-US" smtClean="0"/>
+              <a:rPr lang="en-US"/>
               <a:t>Fourth level</a:t>
             </a:r>
           </a:p>
           <a:p>
             <a:pPr lvl="4"/>
             <a:r>
-              <a:rPr lang="en-US" smtClean="0"/>
+              <a:rPr lang="en-US"/>
               <a:t>Fifth level</a:t>
             </a:r>
-            <a:endParaRPr lang="en-US"/>
           </a:p>
         </p:txBody>
       </p:sp>
@@ -2231,7 +2229,7 @@
           <a:p>
             <a:pPr lvl="0"/>
             <a:r>
-              <a:rPr lang="en-US" smtClean="0"/>
+              <a:rPr lang="en-US"/>
               <a:t>Click to edit Master text styles</a:t>
             </a:r>
           </a:p>
@@ -2254,7 +2252,7 @@
           <a:p>
             <a:fld id="{5BCAD085-E8A6-8845-BD4E-CB4CCA059FC4}" type="datetimeFigureOut">
               <a:rPr lang="en-US" smtClean="0"/>
-              <a:t>1/27/13</a:t>
+              <a:t>10/19/2026</a:t>
             </a:fld>
             <a:endParaRPr lang="en-US"/>
           </a:p>
@@ -2357,10 +2355,9 @@
           </a:lstStyle>
           <a:p>
             <a:r>
-              <a:rPr lang="en-US" smtClean="0"/>
+              <a:rPr lang="en-US"/>
               <a:t>Click to edit Master title style</a:t>
             </a:r>
-            <a:endParaRPr lang="en-US"/>
           </a:p>
         </p:txBody>
       </p:sp>
@@ -2484,7 +2481,7 @@
           <a:p>
             <a:pPr lvl="0"/>
             <a:r>
-              <a:rPr lang="en-US" smtClean="0"/>
+              <a:rPr lang="en-US"/>
               <a:t>Click to edit Master text styles</a:t>
             </a:r>
           </a:p>
@@ -2507,7 +2504,7 @@
           <a:p>
             <a:fld id="{5BCAD085-E8A6-8845-BD4E-CB4CCA059FC4}" type="datetimeFigureOut">
               <a:rPr lang="en-US" smtClean="0"/>
-              <a:t>1/27/13</a:t>
+              <a:t>10/19/2026</a:t>
             </a:fld>
             <a:endParaRPr lang="en-US"/>
           </a:p>
@@ -2616,10 +2613,9 @@
           <a:lstStyle/>
           <a:p>
             <a:r>
-              <a:rPr lang="en-US" smtClean="0"/>
+              <a:rPr lang="en-US"/>
               <a:t>Click to edit Master title style</a:t>
             </a:r>
-            <a:endParaRPr lang="en-US"/>
           </a:p>
         </p:txBody>
       </p:sp>
@@ -2650,38 +2646,37 @@
           <a:p>
             <a:pPr lvl="0"/>
             <a:r>
-              <a:rPr lang="en-US" smtClean="0"/>
+              <a:rPr lang="en-US"/>
               <a:t>Click to edit Master text styles</a:t>
             </a:r>
           </a:p>
           <a:p>
             <a:pPr lvl="1"/>
             <a:r>
-              <a:rPr lang="en-US" smtClean="0"/>
+              <a:rPr lang="en-US"/>
               <a:t>Second level</a:t>
             </a:r>
           </a:p>
           <a:p>
             <a:pPr lvl="2"/>
             <a:r>
-              <a:rPr lang="en-US" smtClean="0"/>
+              <a:rPr lang="en-US"/>
               <a:t>Third level</a:t>
             </a:r>
           </a:p>
           <a:p>
             <a:pPr lvl="3"/>
             <a:r>
-              <a:rPr lang="en-US" smtClean="0"/>
+              <a:rPr lang="en-US"/>
               <a:t>Fourth level</a:t>
             </a:r>
           </a:p>
           <a:p>
             <a:pPr lvl="4"/>
             <a:r>
-              <a:rPr lang="en-US" smtClean="0"/>
+              <a:rPr lang="en-US"/>
               <a:t>Fifth level</a:t>
             </a:r>
-            <a:endParaRPr lang="en-US"/>
           </a:p>
         </p:txBody>
       </p:sp>
@@ -2720,7 +2715,7 @@
           <a:p>
             <a:fld id="{5BCAD085-E8A6-8845-BD4E-CB4CCA059FC4}" type="datetimeFigureOut">
               <a:rPr lang="en-US" smtClean="0"/>
-              <a:t>1/27/13</a:t>
+              <a:t>10/19/2026</a:t>
             </a:fld>
             <a:endParaRPr lang="en-US"/>
           </a:p>
@@ -3079,7 +3074,7 @@
 </file>
 
 <file path=ppt/slides/slide1.xml><?xml version="1.0" encoding="utf-8"?>
-<p:sld xmlns:a="http://schemas.openxmlformats.org/drawingml/2006/main" xmlns:p="http://schemas.openxmlformats.org/presentationml/2006/main" xmlns:r="http://schemas.openxmlformats.org/officeDocument/2006/relationships">
+<p:sld xmlns:a="http://schemas.openxmlformats.org/drawingml/2006/main" xmlns:r="http://schemas.openxmlformats.org/officeDocument/2006/relationships" xmlns:p="http://schemas.openxmlformats.org/presentationml/2006/main">
   <p:cSld>
     <p:bg>
       <p:bgPr>
@@ -3095,7 +3090,14 @@
         <p:cNvGrpSpPr/>
         <p:nvPr/>
       </p:nvGrpSpPr>
-      <p:grpSpPr/>
+      <p:grpSpPr>
+        <a:xfrm>
+          <a:off x="0" y="0"/>
+          <a:ext cx="0" cy="0"/>
+          <a:chOff x="0" y="0"/>
+          <a:chExt cx="0" cy="0"/>
+        </a:xfrm>
+      </p:grpSpPr>
       <p:sp>
         <p:nvSpPr>
           <p:cNvPr id="2" name="Rectangle 1"/>
@@ -3136,6 +3138,7 @@
           <a:lstStyle/>
           <a:p>
             <a:pPr algn="ctr"/>
+            <a:endParaRPr/>
           </a:p>
         </p:txBody>
       </p:sp>
@@ -3179,6 +3182,7 @@
           <a:lstStyle/>
           <a:p>
             <a:pPr algn="ctr"/>
+            <a:endParaRPr/>
           </a:p>
         </p:txBody>
       </p:sp>
@@ -3199,7 +3203,7 @@
           <a:noFill/>
         </p:spPr>
         <p:txBody>
-          <a:bodyPr wrap="square" lIns="18288" rIns="18288" tIns="13716" bIns="9144" anchor="ctr">
+          <a:bodyPr wrap="square" lIns="18288" tIns="13716" rIns="18288" bIns="9144" anchor="ctr">
             <a:spAutoFit/>
           </a:bodyPr>
           <a:lstStyle/>
@@ -3241,7 +3245,7 @@
           <a:noFill/>
         </p:spPr>
         <p:txBody>
-          <a:bodyPr wrap="square" lIns="18288" rIns="18288" tIns="13716" bIns="9144" anchor="ctr">
+          <a:bodyPr wrap="square" lIns="18288" tIns="13716" rIns="18288" bIns="9144" anchor="ctr">
             <a:spAutoFit/>
           </a:bodyPr>
           <a:lstStyle/>
@@ -3283,7 +3287,7 @@
           <a:noFill/>
         </p:spPr>
         <p:txBody>
-          <a:bodyPr wrap="square" lIns="18288" rIns="18288" tIns="13716" bIns="9144" anchor="ctr">
+          <a:bodyPr wrap="square" lIns="18288" tIns="13716" rIns="18288" bIns="9144" anchor="ctr">
             <a:spAutoFit/>
           </a:bodyPr>
           <a:lstStyle/>
@@ -3352,6 +3356,7 @@
           <a:lstStyle/>
           <a:p>
             <a:pPr algn="ctr"/>
+            <a:endParaRPr/>
           </a:p>
         </p:txBody>
       </p:sp>
@@ -3372,7 +3377,7 @@
           <a:noFill/>
         </p:spPr>
         <p:txBody>
-          <a:bodyPr wrap="square" lIns="18288" rIns="18288" tIns="13716" bIns="9144" anchor="ctr">
+          <a:bodyPr wrap="square" lIns="18288" tIns="13716" rIns="18288" bIns="9144" anchor="ctr">
             <a:spAutoFit/>
           </a:bodyPr>
           <a:lstStyle/>
@@ -3441,6 +3446,7 @@
           <a:lstStyle/>
           <a:p>
             <a:pPr algn="ctr"/>
+            <a:endParaRPr/>
           </a:p>
         </p:txBody>
       </p:sp>
@@ -3488,6 +3494,7 @@
           <a:lstStyle/>
           <a:p>
             <a:pPr algn="ctr"/>
+            <a:endParaRPr/>
           </a:p>
         </p:txBody>
       </p:sp>
@@ -3508,7 +3515,7 @@
           <a:noFill/>
         </p:spPr>
         <p:txBody>
-          <a:bodyPr wrap="square" lIns="18288" rIns="18288" tIns="13716" bIns="9144" anchor="ctr">
+          <a:bodyPr wrap="square" lIns="18288" tIns="13716" rIns="18288" bIns="9144" anchor="ctr">
             <a:spAutoFit/>
           </a:bodyPr>
           <a:lstStyle/>
@@ -3550,7 +3557,7 @@
           <a:noFill/>
         </p:spPr>
         <p:txBody>
-          <a:bodyPr wrap="square" lIns="18288" rIns="18288" tIns="13716" bIns="9144" anchor="ctr">
+          <a:bodyPr wrap="square" lIns="18288" tIns="13716" rIns="18288" bIns="9144" anchor="ctr">
             <a:spAutoFit/>
           </a:bodyPr>
           <a:lstStyle/>
@@ -3585,16 +3592,17 @@
         </p:nvPicPr>
         <p:blipFill>
           <a:blip r:embed="rId2"/>
+          <a:srcRect l="918" t="686" r="678" b="1061"/>
           <a:stretch>
             <a:fillRect/>
           </a:stretch>
         </p:blipFill>
         <p:spPr>
           <a:xfrm>
-            <a:off x="1061734" y="2532888"/>
-            <a:ext cx="5539203" cy="3447288"/>
-          </a:xfrm>
-          <a:prstGeom prst="rect">
+            <a:off x="1112521" y="2556533"/>
+            <a:ext cx="5450840" cy="3387068"/>
+          </a:xfrm>
+          <a:prstGeom prst="roundRect">
             <a:avLst/>
           </a:prstGeom>
         </p:spPr>
@@ -3609,16 +3617,17 @@
         </p:nvPicPr>
         <p:blipFill>
           <a:blip r:embed="rId3"/>
+          <a:srcRect l="747" t="1724" r="747" b="1061"/>
           <a:stretch>
             <a:fillRect/>
           </a:stretch>
         </p:blipFill>
         <p:spPr>
           <a:xfrm>
-            <a:off x="7856737" y="2532888"/>
-            <a:ext cx="5848077" cy="3447288"/>
-          </a:xfrm>
-          <a:prstGeom prst="rect">
+            <a:off x="7900416" y="2592324"/>
+            <a:ext cx="5760720" cy="3351277"/>
+          </a:xfrm>
+          <a:prstGeom prst="roundRect">
             <a:avLst/>
           </a:prstGeom>
         </p:spPr>
@@ -3640,7 +3649,7 @@
           <a:noFill/>
         </p:spPr>
         <p:txBody>
-          <a:bodyPr wrap="square" lIns="18288" rIns="18288" tIns="13716" bIns="9144" anchor="ctr">
+          <a:bodyPr wrap="square" lIns="18288" tIns="13716" rIns="18288" bIns="9144" anchor="ctr">
             <a:spAutoFit/>
           </a:bodyPr>
           <a:lstStyle/>
@@ -3673,8 +3682,8 @@
         </p:nvSpPr>
         <p:spPr>
           <a:xfrm>
-            <a:off x="7498079" y="6263640"/>
-            <a:ext cx="6592824" cy="493776"/>
+            <a:off x="7498079" y="6342148"/>
+            <a:ext cx="6592824" cy="336759"/>
           </a:xfrm>
           <a:prstGeom prst="rect">
             <a:avLst/>
@@ -3682,7 +3691,7 @@
           <a:noFill/>
         </p:spPr>
         <p:txBody>
-          <a:bodyPr wrap="square" lIns="18288" rIns="18288" tIns="13716" bIns="9144" anchor="ctr">
+          <a:bodyPr wrap="square" lIns="18288" tIns="13716" rIns="18288" bIns="9144" anchor="ctr">
             <a:spAutoFit/>
           </a:bodyPr>
           <a:lstStyle/>
@@ -3696,13 +3705,31 @@
               </a:spcAft>
             </a:pPr>
             <a:r>
-              <a:rPr sz="1019" b="0">
+              <a:rPr sz="1019" b="0" dirty="0">
                 <a:solidFill>
                   <a:srgbClr val="F3F7FB"/>
                 </a:solidFill>
                 <a:latin typeface="DejaVu Sans"/>
               </a:rPr>
-              <a:t>Two Sankey views: commercial measure per shipping cost and order volumes across category, segment &amp; mode.</a:t>
+              <a:t>Two Sankey views: commercial measure per shipping cost and order volumes across category, segment </a:t>
+            </a:r>
+            <a:r>
+              <a:rPr lang="en-US" sz="1019" dirty="0">
+                <a:solidFill>
+                  <a:srgbClr val="F3F7FB"/>
+                </a:solidFill>
+                <a:latin typeface="DejaVu Sans"/>
+              </a:rPr>
+              <a:t>and shipping </a:t>
+            </a:r>
+            <a:r>
+              <a:rPr sz="1019" b="0" dirty="0">
+                <a:solidFill>
+                  <a:srgbClr val="F3F7FB"/>
+                </a:solidFill>
+                <a:latin typeface="DejaVu Sans"/>
+              </a:rPr>
+              <a:t>mode.</a:t>
             </a:r>
           </a:p>
         </p:txBody>
@@ -3747,6 +3774,7 @@
           <a:lstStyle/>
           <a:p>
             <a:pPr algn="ctr"/>
+            <a:endParaRPr/>
           </a:p>
         </p:txBody>
       </p:sp>
@@ -3794,6 +3822,7 @@
           <a:lstStyle/>
           <a:p>
             <a:pPr algn="ctr"/>
+            <a:endParaRPr/>
           </a:p>
         </p:txBody>
       </p:sp>
@@ -3816,7 +3845,7 @@
           <a:noFill/>
         </p:spPr>
         <p:txBody>
-          <a:bodyPr wrap="square" lIns="18288" rIns="18288" tIns="13716" bIns="9144" anchor="ctr">
+          <a:bodyPr wrap="square" lIns="18288" tIns="13716" rIns="18288" bIns="9144" anchor="ctr">
             <a:spAutoFit/>
           </a:bodyPr>
           <a:lstStyle/>
@@ -3885,6 +3914,7 @@
           <a:lstStyle/>
           <a:p>
             <a:pPr algn="ctr"/>
+            <a:endParaRPr/>
           </a:p>
         </p:txBody>
       </p:sp>
@@ -3907,7 +3937,7 @@
           <a:noFill/>
         </p:spPr>
         <p:txBody>
-          <a:bodyPr wrap="square" lIns="18288" rIns="18288" tIns="13716" bIns="9144" anchor="ctr">
+          <a:bodyPr wrap="square" lIns="18288" tIns="13716" rIns="18288" bIns="9144" anchor="ctr">
             <a:spAutoFit/>
           </a:bodyPr>
           <a:lstStyle/>
@@ -3976,6 +4006,7 @@
           <a:lstStyle/>
           <a:p>
             <a:pPr algn="ctr"/>
+            <a:endParaRPr/>
           </a:p>
         </p:txBody>
       </p:sp>
@@ -3998,7 +4029,7 @@
           <a:noFill/>
         </p:spPr>
         <p:txBody>
-          <a:bodyPr wrap="square" lIns="18288" rIns="18288" tIns="13716" bIns="9144" anchor="ctr">
+          <a:bodyPr wrap="square" lIns="18288" tIns="13716" rIns="18288" bIns="9144" anchor="ctr">
             <a:spAutoFit/>
           </a:bodyPr>
           <a:lstStyle/>
@@ -4040,7 +4071,7 @@
           <a:noFill/>
         </p:spPr>
         <p:txBody>
-          <a:bodyPr wrap="square" lIns="18288" rIns="18288" tIns="13716" bIns="9144" anchor="ctr">
+          <a:bodyPr wrap="square" lIns="18288" tIns="13716" rIns="18288" bIns="9144" anchor="ctr">
             <a:spAutoFit/>
           </a:bodyPr>
           <a:lstStyle/>
